--- a/media/resources/files/Onduktar_Boluu_Bingo_60sY1oD.pptx
+++ b/media/resources/files/Onduktar_Boluu_Bingo_60sY1oD.pptx
@@ -18411,7 +18411,7 @@
                 <a:ea typeface="+mn-ea"/>
                 <a:cs typeface="+mn-cs"/>
               </a:rPr>
-              <a:t>Турдуу пикирлер учун ыраазычылык билдиребиз.</a:t>
+              <a:t>Түрдүү пикирлер үчүн ыраазычылык билдиребиз.</a:t>
             </a:r>
           </a:p>
           <a:p>

--- a/media/resources/files/Onduktar_Boluu_Bingo_60sY1oD.pptx
+++ b/media/resources/files/Onduktar_Boluu_Bingo_60sY1oD.pptx
@@ -3613,7 +3613,7 @@
                 <a:ea typeface="+mn-ea"/>
                 <a:cs typeface="+mn-cs"/>
               </a:rPr>
-              <a:t>Окуучулар </a:t>
+              <a:t>Окуучулар тордон тогуз жоопту тандап, дептердеги 3х3 чакмакка каалагандай коюшат.</a:t>
             </a:r>
             <a:r>
               <a:rPr kumimoji="0" lang="ru-RU" sz="2400" b="0" i="0" u="none" strike="noStrike" kern="1200" cap="none" spc="0" normalizeH="0" baseline="0" noProof="0" dirty="0">
@@ -3630,7 +3630,7 @@
                 <a:ea typeface="+mn-ea"/>
                 <a:cs typeface="+mn-cs"/>
               </a:rPr>
-              <a:t>суроо</a:t>
+              <a:t/>
             </a:r>
             <a:r>
               <a:rPr kumimoji="0" lang="en-US" sz="2400" b="0" i="0" u="none" strike="noStrike" kern="1200" cap="none" spc="0" normalizeH="0" baseline="0" noProof="0" dirty="0">
@@ -3647,7 +3647,7 @@
                 <a:ea typeface="+mn-ea"/>
                 <a:cs typeface="+mn-cs"/>
               </a:rPr>
-              <a:t> </a:t>
+              <a:t/>
             </a:r>
             <a:r>
               <a:rPr kumimoji="0" lang="en-US" sz="2400" b="0" i="0" u="none" strike="noStrike" kern="1200" cap="none" spc="0" normalizeH="0" baseline="0" noProof="0" dirty="0" err="1">
@@ -3664,7 +3664,7 @@
                 <a:ea typeface="+mn-ea"/>
                 <a:cs typeface="+mn-cs"/>
               </a:rPr>
-              <a:t>тордон</a:t>
+              <a:t/>
             </a:r>
             <a:r>
               <a:rPr kumimoji="0" lang="en-US" sz="2400" b="0" i="0" u="none" strike="noStrike" kern="1200" cap="none" spc="0" normalizeH="0" baseline="0" noProof="0" dirty="0">
@@ -3681,7 +3681,7 @@
                 <a:ea typeface="+mn-ea"/>
                 <a:cs typeface="+mn-cs"/>
               </a:rPr>
-              <a:t> </a:t>
+              <a:t/>
             </a:r>
             <a:r>
               <a:rPr kumimoji="0" lang="en-US" sz="2000" b="0" i="0" u="none" strike="noStrike" kern="1200" cap="none" spc="0" normalizeH="0" baseline="0" noProof="0" dirty="0" err="1">
@@ -3698,7 +3698,7 @@
                 <a:ea typeface="+mn-ea"/>
                 <a:cs typeface="+mn-cs"/>
               </a:rPr>
-              <a:t>тогуз</a:t>
+              <a:t/>
             </a:r>
             <a:r>
               <a:rPr kumimoji="0" lang="en-US" sz="2000" b="0" i="0" u="none" strike="noStrike" kern="1200" cap="none" spc="0" normalizeH="0" baseline="0" noProof="0" dirty="0">
@@ -3715,7 +3715,7 @@
                 <a:ea typeface="+mn-ea"/>
                 <a:cs typeface="+mn-cs"/>
               </a:rPr>
-              <a:t> </a:t>
+              <a:t/>
             </a:r>
             <a:r>
               <a:rPr kumimoji="0" lang="en-US" sz="2000" b="0" i="0" u="none" strike="noStrike" kern="1200" cap="none" spc="0" normalizeH="0" baseline="0" noProof="0" dirty="0" err="1">
@@ -3732,7 +3732,7 @@
                 <a:ea typeface="+mn-ea"/>
                 <a:cs typeface="+mn-cs"/>
               </a:rPr>
-              <a:t>жоопту</a:t>
+              <a:t/>
             </a:r>
             <a:r>
               <a:rPr kumimoji="0" lang="en-US" sz="2000" b="0" i="0" u="none" strike="noStrike" kern="1200" cap="none" spc="0" normalizeH="0" baseline="0" noProof="0" dirty="0">
@@ -3749,7 +3749,7 @@
                 <a:ea typeface="+mn-ea"/>
                 <a:cs typeface="+mn-cs"/>
               </a:rPr>
-              <a:t> </a:t>
+              <a:t/>
             </a:r>
             <a:r>
               <a:rPr kumimoji="0" lang="en-US" sz="2000" b="0" i="0" u="none" strike="noStrike" kern="1200" cap="none" spc="0" normalizeH="0" baseline="0" noProof="0" dirty="0" err="1">
@@ -3766,7 +3766,7 @@
                 <a:ea typeface="+mn-ea"/>
                 <a:cs typeface="+mn-cs"/>
               </a:rPr>
-              <a:t>тандап</a:t>
+              <a:t/>
             </a:r>
             <a:r>
               <a:rPr kumimoji="0" lang="en-US" sz="2000" b="0" i="0" u="none" strike="noStrike" kern="1200" cap="none" spc="0" normalizeH="0" baseline="0" noProof="0" dirty="0">
@@ -3783,7 +3783,7 @@
                 <a:ea typeface="+mn-ea"/>
                 <a:cs typeface="+mn-cs"/>
               </a:rPr>
-              <a:t>, </a:t>
+              <a:t/>
             </a:r>
             <a:r>
               <a:rPr kumimoji="0" lang="en-US" sz="2000" b="0" i="0" u="none" strike="noStrike" kern="1200" cap="none" spc="0" normalizeH="0" baseline="0" noProof="0" dirty="0" err="1">
@@ -3800,7 +3800,7 @@
                 <a:ea typeface="+mn-ea"/>
                 <a:cs typeface="+mn-cs"/>
               </a:rPr>
-              <a:t>аларды</a:t>
+              <a:t/>
             </a:r>
             <a:r>
               <a:rPr kumimoji="0" lang="en-US" sz="2000" b="0" i="0" u="none" strike="noStrike" kern="1200" cap="none" spc="0" normalizeH="0" baseline="0" noProof="0" dirty="0">
@@ -3817,7 +3817,7 @@
                 <a:ea typeface="+mn-ea"/>
                 <a:cs typeface="+mn-cs"/>
               </a:rPr>
-              <a:t> </a:t>
+              <a:t/>
             </a:r>
             <a:r>
               <a:rPr kumimoji="0" lang="ru-RU" sz="2000" b="0" i="0" u="none" strike="noStrike" kern="1200" cap="none" spc="0" normalizeH="0" baseline="0" noProof="0" dirty="0">
@@ -3834,7 +3834,7 @@
                 <a:ea typeface="+mn-ea"/>
                 <a:cs typeface="+mn-cs"/>
               </a:rPr>
-              <a:t>дептериндеги</a:t>
+              <a:t/>
             </a:r>
             <a:r>
               <a:rPr kumimoji="0" lang="en-US" sz="2000" b="0" i="0" u="none" strike="noStrike" kern="1200" cap="none" spc="0" normalizeH="0" baseline="0" noProof="0" dirty="0">
@@ -3851,7 +3851,7 @@
                 <a:ea typeface="+mn-ea"/>
                 <a:cs typeface="+mn-cs"/>
               </a:rPr>
-              <a:t> 3х3 </a:t>
+              <a:t/>
             </a:r>
             <a:r>
               <a:rPr kumimoji="0" lang="en-US" sz="2000" b="0" i="0" u="none" strike="noStrike" kern="1200" cap="none" spc="0" normalizeH="0" baseline="0" noProof="0" dirty="0" err="1">
@@ -3868,7 +3868,7 @@
                 <a:ea typeface="+mn-ea"/>
                 <a:cs typeface="+mn-cs"/>
               </a:rPr>
-              <a:t>квадратка</a:t>
+              <a:t/>
             </a:r>
             <a:r>
               <a:rPr kumimoji="0" lang="en-US" sz="2000" b="0" i="0" u="none" strike="noStrike" kern="1200" cap="none" spc="0" normalizeH="0" baseline="0" noProof="0" dirty="0">
@@ -3885,7 +3885,7 @@
                 <a:ea typeface="+mn-ea"/>
                 <a:cs typeface="+mn-cs"/>
               </a:rPr>
-              <a:t> </a:t>
+              <a:t/>
             </a:r>
             <a:r>
               <a:rPr kumimoji="0" lang="en-US" sz="2000" b="0" i="0" u="none" strike="noStrike" kern="1200" cap="none" spc="0" normalizeH="0" baseline="0" noProof="0" dirty="0" err="1">
@@ -3902,7 +3902,7 @@
                 <a:ea typeface="+mn-ea"/>
                 <a:cs typeface="+mn-cs"/>
               </a:rPr>
-              <a:t>туш</a:t>
+              <a:t/>
             </a:r>
             <a:r>
               <a:rPr kumimoji="0" lang="en-US" sz="2000" b="0" i="0" u="none" strike="noStrike" kern="1200" cap="none" spc="0" normalizeH="0" baseline="0" noProof="0" dirty="0">
@@ -3919,7 +3919,7 @@
                 <a:ea typeface="+mn-ea"/>
                 <a:cs typeface="+mn-cs"/>
               </a:rPr>
-              <a:t> </a:t>
+              <a:t/>
             </a:r>
             <a:r>
               <a:rPr kumimoji="0" lang="en-US" sz="2000" b="0" i="0" u="none" strike="noStrike" kern="1200" cap="none" spc="0" normalizeH="0" baseline="0" noProof="0" dirty="0" err="1">
@@ -3936,7 +3936,7 @@
                 <a:ea typeface="+mn-ea"/>
                 <a:cs typeface="+mn-cs"/>
               </a:rPr>
-              <a:t>келди</a:t>
+              <a:t/>
             </a:r>
             <a:r>
               <a:rPr kumimoji="0" lang="en-US" sz="2000" b="0" i="0" u="none" strike="noStrike" kern="1200" cap="none" spc="0" normalizeH="0" baseline="0" noProof="0" dirty="0">
@@ -3953,7 +3953,7 @@
                 <a:ea typeface="+mn-ea"/>
                 <a:cs typeface="+mn-cs"/>
               </a:rPr>
-              <a:t> </a:t>
+              <a:t/>
             </a:r>
             <a:r>
               <a:rPr kumimoji="0" lang="en-US" sz="2000" b="0" i="0" u="none" strike="noStrike" kern="1200" cap="none" spc="0" normalizeH="0" baseline="0" noProof="0" dirty="0" err="1">
@@ -3970,7 +3970,7 @@
                 <a:ea typeface="+mn-ea"/>
                 <a:cs typeface="+mn-cs"/>
               </a:rPr>
-              <a:t>жайгаштырышы</a:t>
+              <a:t/>
             </a:r>
             <a:r>
               <a:rPr kumimoji="0" lang="en-US" sz="2000" b="0" i="0" u="none" strike="noStrike" kern="1200" cap="none" spc="0" normalizeH="0" baseline="0" noProof="0" dirty="0">
@@ -3987,7 +3987,7 @@
                 <a:ea typeface="+mn-ea"/>
                 <a:cs typeface="+mn-cs"/>
               </a:rPr>
-              <a:t> </a:t>
+              <a:t/>
             </a:r>
             <a:r>
               <a:rPr kumimoji="0" lang="en-US" sz="2000" b="0" i="0" u="none" strike="noStrike" kern="1200" cap="none" spc="0" normalizeH="0" baseline="0" noProof="0" dirty="0" err="1">
@@ -4004,7 +4004,7 @@
                 <a:ea typeface="+mn-ea"/>
                 <a:cs typeface="+mn-cs"/>
               </a:rPr>
-              <a:t>керек</a:t>
+              <a:t/>
             </a:r>
             <a:r>
               <a:rPr kumimoji="0" lang="en-US" sz="2000" b="0" i="0" u="none" strike="noStrike" kern="1200" cap="none" spc="0" normalizeH="0" baseline="0" noProof="0" dirty="0">
@@ -4021,7 +4021,7 @@
                 <a:ea typeface="+mn-ea"/>
                 <a:cs typeface="+mn-cs"/>
               </a:rPr>
-              <a:t>.</a:t>
+              <a:t/>
             </a:r>
           </a:p>
           <a:p>
@@ -5306,7 +5306,7 @@
                   <a:schemeClr val="tx1"/>
                 </a:solidFill>
               </a:rPr>
-              <a:t>0.8</a:t>
+              <a:t>0,8</a:t>
             </a:r>
           </a:p>
         </p:txBody>
@@ -5342,7 +5342,7 @@
             <a:pPr algn="ctr"/>
             <a:r>
               <a:rPr lang="en-GB" sz="8800" dirty="0"/>
-              <a:t>3.2 ÷ 4</a:t>
+              <a:t>3,2 ÷ 4</a:t>
             </a:r>
           </a:p>
         </p:txBody>
@@ -5666,7 +5666,7 @@
             <a:pPr algn="ctr"/>
             <a:r>
               <a:rPr lang="en-GB" sz="8800" dirty="0"/>
-              <a:t>2.8 ÷ 1.4</a:t>
+              <a:t>2,8 ÷ 1,4</a:t>
             </a:r>
           </a:p>
         </p:txBody>
@@ -5990,7 +5990,7 @@
             <a:pPr algn="ctr"/>
             <a:r>
               <a:rPr lang="en-GB" sz="8800" dirty="0"/>
-              <a:t>1.5 ÷ 0.5</a:t>
+              <a:t>1,5 ÷ 0,5</a:t>
             </a:r>
           </a:p>
         </p:txBody>
@@ -6314,7 +6314,7 @@
             <a:pPr algn="ctr"/>
             <a:r>
               <a:rPr lang="en-GB" sz="8800" dirty="0"/>
-              <a:t>1.8 ÷ 0.2</a:t>
+              <a:t>1,8 ÷ 0,2</a:t>
             </a:r>
           </a:p>
         </p:txBody>
@@ -6602,7 +6602,7 @@
                   <a:schemeClr val="tx1"/>
                 </a:solidFill>
               </a:rPr>
-              <a:t>0.3</a:t>
+              <a:t>0,3</a:t>
             </a:r>
           </a:p>
         </p:txBody>
@@ -6638,7 +6638,7 @@
             <a:pPr algn="ctr"/>
             <a:r>
               <a:rPr lang="en-GB" sz="8800" dirty="0"/>
-              <a:t>0.6 ÷ 2</a:t>
+              <a:t>0,6 ÷ 2</a:t>
             </a:r>
           </a:p>
         </p:txBody>
@@ -6926,7 +6926,7 @@
                   <a:schemeClr val="tx1"/>
                 </a:solidFill>
               </a:rPr>
-              <a:t>0.15</a:t>
+              <a:t>0,15</a:t>
             </a:r>
           </a:p>
         </p:txBody>
@@ -6962,7 +6962,7 @@
             <a:pPr algn="ctr"/>
             <a:r>
               <a:rPr lang="en-GB" sz="8800" dirty="0"/>
-              <a:t>0.3 ÷ 2</a:t>
+              <a:t>0,3 ÷ 2</a:t>
             </a:r>
           </a:p>
         </p:txBody>
@@ -7250,7 +7250,7 @@
                   <a:schemeClr val="tx1"/>
                 </a:solidFill>
               </a:rPr>
-              <a:t>0.35</a:t>
+              <a:t>0,35</a:t>
             </a:r>
           </a:p>
         </p:txBody>
@@ -7286,7 +7286,7 @@
             <a:pPr algn="ctr"/>
             <a:r>
               <a:rPr lang="en-GB" sz="8800" dirty="0"/>
-              <a:t>0.7 ÷ 2</a:t>
+              <a:t>0,7 ÷ 2</a:t>
             </a:r>
           </a:p>
         </p:txBody>
@@ -7610,7 +7610,7 @@
             <a:pPr algn="ctr"/>
             <a:r>
               <a:rPr lang="en-GB" sz="8800" dirty="0"/>
-              <a:t>4.8 ÷ 0.4</a:t>
+              <a:t>4,8 ÷ 0,4</a:t>
             </a:r>
           </a:p>
         </p:txBody>
@@ -7898,7 +7898,7 @@
                   <a:schemeClr val="tx1"/>
                 </a:solidFill>
               </a:rPr>
-              <a:t>0.16</a:t>
+              <a:t>0,16</a:t>
             </a:r>
           </a:p>
         </p:txBody>
@@ -7934,7 +7934,7 @@
             <a:pPr algn="ctr"/>
             <a:r>
               <a:rPr lang="en-GB" sz="8800" dirty="0"/>
-              <a:t>0.8 ÷ 5</a:t>
+              <a:t>0,8 ÷ 5</a:t>
             </a:r>
           </a:p>
         </p:txBody>
@@ -8258,7 +8258,7 @@
             <a:pPr algn="ctr"/>
             <a:r>
               <a:rPr lang="en-GB" sz="8800" dirty="0"/>
-              <a:t>4.5 ÷ 0.3</a:t>
+              <a:t>4,5 ÷ 0,3</a:t>
             </a:r>
           </a:p>
         </p:txBody>
@@ -18703,7 +18703,7 @@
                           <a:ea typeface="+mn-ea"/>
                           <a:cs typeface="+mn-cs"/>
                         </a:rPr>
-                        <a:t>0.8</a:t>
+                        <a:t>0,8</a:t>
                       </a:r>
                     </a:p>
                   </a:txBody>
@@ -18869,7 +18869,7 @@
                           <a:ea typeface="+mn-ea"/>
                           <a:cs typeface="+mn-cs"/>
                         </a:rPr>
-                        <a:t>0.3</a:t>
+                        <a:t>0,3</a:t>
                       </a:r>
                     </a:p>
                   </a:txBody>
@@ -19125,7 +19125,7 @@
                           <a:ea typeface="+mn-ea"/>
                           <a:cs typeface="+mn-cs"/>
                         </a:rPr>
-                        <a:t>0.1</a:t>
+                        <a:t>0,1</a:t>
                       </a:r>
                     </a:p>
                   </a:txBody>
@@ -19291,7 +19291,7 @@
                           <a:ea typeface="+mn-ea"/>
                           <a:cs typeface="+mn-cs"/>
                         </a:rPr>
-                        <a:t>0.35</a:t>
+                        <a:t>0,35</a:t>
                       </a:r>
                     </a:p>
                   </a:txBody>
@@ -19381,7 +19381,7 @@
                           <a:ea typeface="+mn-ea"/>
                           <a:cs typeface="+mn-cs"/>
                         </a:rPr>
-                        <a:t>1.2</a:t>
+                        <a:t>1,2</a:t>
                       </a:r>
                     </a:p>
                   </a:txBody>
@@ -19547,7 +19547,7 @@
                           <a:ea typeface="+mn-ea"/>
                           <a:cs typeface="+mn-cs"/>
                         </a:rPr>
-                        <a:t>0.15</a:t>
+                        <a:t>0,15</a:t>
                       </a:r>
                     </a:p>
                   </a:txBody>
@@ -19803,7 +19803,7 @@
                           <a:ea typeface="+mn-ea"/>
                           <a:cs typeface="+mn-cs"/>
                         </a:rPr>
-                        <a:t>0.16</a:t>
+                        <a:t>0,16</a:t>
                       </a:r>
                     </a:p>
                   </a:txBody>
@@ -19886,7 +19886,7 @@
                           <a:ea typeface="+mn-ea"/>
                           <a:cs typeface="+mn-cs"/>
                         </a:rPr>
-                        <a:t>0.2</a:t>
+                        <a:t>0,2</a:t>
                       </a:r>
                     </a:p>
                   </a:txBody>
@@ -21193,7 +21193,7 @@
             <a:pPr algn="ctr"/>
             <a:r>
               <a:rPr lang="en-GB" sz="8800" dirty="0"/>
-              <a:t>3 ÷ 0.5</a:t>
+              <a:t>3 ÷ 0,5</a:t>
             </a:r>
           </a:p>
         </p:txBody>
@@ -21481,7 +21481,7 @@
                   <a:schemeClr val="tx1"/>
                 </a:solidFill>
               </a:rPr>
-              <a:t>0.2</a:t>
+              <a:t>0,2</a:t>
             </a:r>
           </a:p>
         </p:txBody>
@@ -21517,7 +21517,7 @@
             <a:pPr algn="ctr"/>
             <a:r>
               <a:rPr lang="en-GB" sz="8800" dirty="0"/>
-              <a:t>0.8 ÷ 4</a:t>
+              <a:t>0,8 ÷ 4</a:t>
             </a:r>
           </a:p>
         </p:txBody>
@@ -21841,7 +21841,7 @@
             <a:pPr algn="ctr"/>
             <a:r>
               <a:rPr lang="en-GB" sz="8800" dirty="0"/>
-              <a:t>4 ÷ 0.8</a:t>
+              <a:t>4 ÷ 0,8</a:t>
             </a:r>
           </a:p>
         </p:txBody>
@@ -22129,7 +22129,7 @@
                   <a:schemeClr val="tx1"/>
                 </a:solidFill>
               </a:rPr>
-              <a:t>0.1</a:t>
+              <a:t>0,1</a:t>
             </a:r>
           </a:p>
         </p:txBody>
@@ -22165,7 +22165,7 @@
             <a:pPr algn="ctr"/>
             <a:r>
               <a:rPr lang="en-GB" sz="8800" dirty="0"/>
-              <a:t>0.7 ÷ 7</a:t>
+              <a:t>0,7 ÷ 7</a:t>
             </a:r>
           </a:p>
         </p:txBody>
@@ -22489,7 +22489,7 @@
             <a:pPr algn="ctr"/>
             <a:r>
               <a:rPr lang="en-GB" sz="8800" dirty="0"/>
-              <a:t>2.1 ÷ 0.3</a:t>
+              <a:t>2,1 ÷ 0,3</a:t>
             </a:r>
           </a:p>
         </p:txBody>
@@ -22777,7 +22777,7 @@
                   <a:schemeClr val="tx1"/>
                 </a:solidFill>
               </a:rPr>
-              <a:t>1.2</a:t>
+              <a:t>1,2</a:t>
             </a:r>
           </a:p>
         </p:txBody>
@@ -22813,7 +22813,7 @@
             <a:pPr algn="ctr"/>
             <a:r>
               <a:rPr lang="en-GB" sz="8800" dirty="0"/>
-              <a:t>3.6 ÷ 3</a:t>
+              <a:t>3,6 ÷ 3</a:t>
             </a:r>
           </a:p>
         </p:txBody>
